--- a/Actividad 5.3 Banco de ejercicios_AlanRodríguez_ABD_6ISCM.pptx
+++ b/Actividad 5.3 Banco de ejercicios_AlanRodríguez_ABD_6ISCM.pptx
@@ -345,7 +345,7 @@
             <a:fld id="{1D8BD707-D9CF-40AE-B4C6-C98DA3205C09}" type="datetimeFigureOut">
               <a:rPr lang="en-US" smtClean="0"/>
               <a:pPr/>
-              <a:t>6/13/2026</a:t>
+              <a:t>6/15/2026</a:t>
             </a:fld>
             <a:endParaRPr lang="en-US"/>
           </a:p>
@@ -510,7 +510,7 @@
             <a:fld id="{1D8BD707-D9CF-40AE-B4C6-C98DA3205C09}" type="datetimeFigureOut">
               <a:rPr lang="en-US" smtClean="0"/>
               <a:pPr/>
-              <a:t>6/13/2026</a:t>
+              <a:t>6/15/2026</a:t>
             </a:fld>
             <a:endParaRPr lang="en-US"/>
           </a:p>
@@ -685,7 +685,7 @@
             <a:fld id="{1D8BD707-D9CF-40AE-B4C6-C98DA3205C09}" type="datetimeFigureOut">
               <a:rPr lang="en-US" smtClean="0"/>
               <a:pPr/>
-              <a:t>6/13/2026</a:t>
+              <a:t>6/15/2026</a:t>
             </a:fld>
             <a:endParaRPr lang="en-US"/>
           </a:p>
@@ -850,7 +850,7 @@
             <a:fld id="{1D8BD707-D9CF-40AE-B4C6-C98DA3205C09}" type="datetimeFigureOut">
               <a:rPr lang="en-US" smtClean="0"/>
               <a:pPr/>
-              <a:t>6/13/2026</a:t>
+              <a:t>6/15/2026</a:t>
             </a:fld>
             <a:endParaRPr lang="en-US"/>
           </a:p>
@@ -1092,7 +1092,7 @@
             <a:fld id="{1D8BD707-D9CF-40AE-B4C6-C98DA3205C09}" type="datetimeFigureOut">
               <a:rPr lang="en-US" smtClean="0"/>
               <a:pPr/>
-              <a:t>6/13/2026</a:t>
+              <a:t>6/15/2026</a:t>
             </a:fld>
             <a:endParaRPr lang="en-US"/>
           </a:p>
@@ -1374,7 +1374,7 @@
             <a:fld id="{1D8BD707-D9CF-40AE-B4C6-C98DA3205C09}" type="datetimeFigureOut">
               <a:rPr lang="en-US" smtClean="0"/>
               <a:pPr/>
-              <a:t>6/13/2026</a:t>
+              <a:t>6/15/2026</a:t>
             </a:fld>
             <a:endParaRPr lang="en-US"/>
           </a:p>
@@ -1790,7 +1790,7 @@
             <a:fld id="{1D8BD707-D9CF-40AE-B4C6-C98DA3205C09}" type="datetimeFigureOut">
               <a:rPr lang="en-US" smtClean="0"/>
               <a:pPr/>
-              <a:t>6/13/2026</a:t>
+              <a:t>6/15/2026</a:t>
             </a:fld>
             <a:endParaRPr lang="en-US"/>
           </a:p>
@@ -1904,7 +1904,7 @@
             <a:fld id="{1D8BD707-D9CF-40AE-B4C6-C98DA3205C09}" type="datetimeFigureOut">
               <a:rPr lang="en-US" smtClean="0"/>
               <a:pPr/>
-              <a:t>6/13/2026</a:t>
+              <a:t>6/15/2026</a:t>
             </a:fld>
             <a:endParaRPr lang="en-US"/>
           </a:p>
@@ -1996,7 +1996,7 @@
             <a:fld id="{1D8BD707-D9CF-40AE-B4C6-C98DA3205C09}" type="datetimeFigureOut">
               <a:rPr lang="en-US" smtClean="0"/>
               <a:pPr/>
-              <a:t>6/13/2026</a:t>
+              <a:t>6/15/2026</a:t>
             </a:fld>
             <a:endParaRPr lang="en-US"/>
           </a:p>
@@ -2268,7 +2268,7 @@
             <a:fld id="{1D8BD707-D9CF-40AE-B4C6-C98DA3205C09}" type="datetimeFigureOut">
               <a:rPr lang="en-US" smtClean="0"/>
               <a:pPr/>
-              <a:t>6/13/2026</a:t>
+              <a:t>6/15/2026</a:t>
             </a:fld>
             <a:endParaRPr lang="en-US"/>
           </a:p>
@@ -2517,7 +2517,7 @@
             <a:fld id="{1D8BD707-D9CF-40AE-B4C6-C98DA3205C09}" type="datetimeFigureOut">
               <a:rPr lang="en-US" smtClean="0"/>
               <a:pPr/>
-              <a:t>6/13/2026</a:t>
+              <a:t>6/15/2026</a:t>
             </a:fld>
             <a:endParaRPr lang="en-US"/>
           </a:p>
@@ -2725,7 +2725,7 @@
             <a:fld id="{1D8BD707-D9CF-40AE-B4C6-C98DA3205C09}" type="datetimeFigureOut">
               <a:rPr lang="en-US" smtClean="0"/>
               <a:pPr/>
-              <a:t>6/13/2026</a:t>
+              <a:t>6/15/2026</a:t>
             </a:fld>
             <a:endParaRPr lang="en-US"/>
           </a:p>
@@ -7514,7 +7514,7 @@
         <p:spPr>
           <a:xfrm>
             <a:off x="571500" y="8176307"/>
-            <a:ext cx="17145000" cy="1513235"/>
+            <a:ext cx="17145000" cy="2026196"/>
           </a:xfrm>
           <a:prstGeom prst="rect">
             <a:avLst/>
@@ -7576,7 +7576,7 @@
               </a:lnSpc>
             </a:pPr>
             <a:r>
-              <a:rPr lang="en-US" sz="3200" dirty="0">
+              <a:rPr lang="en-US" sz="3200">
                 <a:solidFill>
                   <a:srgbClr val="000000"/>
                 </a:solidFill>
@@ -7586,8 +7586,24 @@
                 <a:sym typeface="Glacial Indifference"/>
                 <a:hlinkClick r:id="rId4"/>
               </a:rPr>
-              <a:t>https://github.com/Alan-Rodriguez0/TBD-Unidad-6.git</a:t>
-            </a:r>
+              <a:t>https://github.com/Alan-Rodriguez0/ABD-Tema-5.git</a:t>
+            </a:r>
+            <a:endParaRPr lang="en-US" sz="3200">
+              <a:solidFill>
+                <a:srgbClr val="000000"/>
+              </a:solidFill>
+              <a:latin typeface="Glacial Indifference"/>
+              <a:ea typeface="Glacial Indifference"/>
+              <a:cs typeface="Glacial Indifference"/>
+              <a:sym typeface="Glacial Indifference"/>
+            </a:endParaRPr>
+          </a:p>
+          <a:p>
+            <a:pPr algn="ctr">
+              <a:lnSpc>
+                <a:spcPts val="4000"/>
+              </a:lnSpc>
+            </a:pPr>
             <a:endParaRPr lang="en-US" sz="3200" dirty="0">
               <a:solidFill>
                 <a:srgbClr val="000000"/>
@@ -7600,6 +7616,36 @@
           </a:p>
         </p:txBody>
       </p:sp>
+      <p:pic>
+        <p:nvPicPr>
+          <p:cNvPr id="7" name="Imagen 6">
+            <a:extLst>
+              <a:ext uri="{FF2B5EF4-FFF2-40B4-BE49-F238E27FC236}">
+                <a16:creationId xmlns:a16="http://schemas.microsoft.com/office/drawing/2014/main" id="{D5E7E782-7353-4336-8A5D-845B282B7E51}"/>
+              </a:ext>
+            </a:extLst>
+          </p:cNvPr>
+          <p:cNvPicPr>
+            <a:picLocks noChangeAspect="1"/>
+          </p:cNvPicPr>
+          <p:nvPr/>
+        </p:nvPicPr>
+        <p:blipFill>
+          <a:blip r:embed="rId5"/>
+          <a:stretch>
+            <a:fillRect/>
+          </a:stretch>
+        </p:blipFill>
+        <p:spPr>
+          <a:xfrm>
+            <a:off x="3309579" y="1323522"/>
+            <a:ext cx="11658600" cy="6557963"/>
+          </a:xfrm>
+          <a:prstGeom prst="rect">
+            <a:avLst/>
+          </a:prstGeom>
+        </p:spPr>
+      </p:pic>
     </p:spTree>
   </p:cSld>
   <p:clrMapOvr>
